--- a/courses/590-fall-2026/590-lecture-2.pptx
+++ b/courses/590-fall-2026/590-lecture-2.pptx
@@ -4127,6 +4127,7 @@
               <a:buNone/>
             </a:pPr>
             <a:r>
+              <a:rPr/>
               <a:t>Lots of answers, lots of guidance…</a:t>
             </a:r>
           </a:p>
@@ -4219,6 +4220,7 @@
               <a:buNone/>
             </a:pPr>
             <a:r>
+              <a:rPr/>
               <a:t>Image</a:t>
             </a:r>
           </a:p>
@@ -4278,18 +4280,21 @@
           <a:p>
             <a:pPr lvl="0"/>
             <a:r>
+              <a:rPr/>
               <a:t>We have a Research Question / Topic</a:t>
             </a:r>
           </a:p>
           <a:p>
             <a:pPr lvl="0"/>
             <a:r>
+              <a:rPr/>
               <a:t>What’s next? Just blast out a search on Google Scholar / University Website? Build a list of references, annotate, summarize, organize? Find the gap?</a:t>
             </a:r>
           </a:p>
           <a:p>
             <a:pPr lvl="1"/>
             <a:r>
+              <a:rPr/>
               <a:t>But can come across as arbitrary</a:t>
             </a:r>
           </a:p>
@@ -4300,6 +4305,7 @@
               <a:t>Or</a:t>
             </a:r>
             <a:r>
+              <a:rPr/>
               <a:t>: think of the Literature Review as a mini-research project within the project ( / article / dissertation)</a:t>
             </a:r>
           </a:p>
@@ -4349,6 +4355,7 @@
               <a:buNone/>
             </a:pPr>
             <a:r>
+              <a:rPr/>
               <a:t>Learn from Marx?</a:t>
             </a:r>
           </a:p>
@@ -4373,6 +4380,7 @@
           <a:p>
             <a:pPr lvl="0"/>
             <a:r>
+              <a:rPr/>
               <a:t>Order of </a:t>
             </a:r>
             <a:r>
@@ -4380,6 +4388,7 @@
               <a:t>analysis</a:t>
             </a:r>
             <a:r>
+              <a:rPr/>
               <a:t> is different from order of </a:t>
             </a:r>
             <a:r>
@@ -4390,12 +4399,14 @@
           <a:p>
             <a:pPr lvl="1"/>
             <a:r>
+              <a:rPr/>
               <a:t>In analysis we go from concrete (stuff we see) to abstract (concepts of thought)</a:t>
             </a:r>
           </a:p>
           <a:p>
             <a:pPr lvl="1"/>
             <a:r>
+              <a:rPr/>
               <a:t>In presentation, we go from abstract (concepts) to concrete (the world of experience) - </a:t>
             </a:r>
             <a:r>
@@ -4403,6 +4414,7 @@
               <a:t>explaining</a:t>
             </a:r>
             <a:r>
+              <a:rPr/>
               <a:t> the world of experience</a:t>
             </a:r>
           </a:p>
@@ -4462,6 +4474,7 @@
               <a:buNone/>
             </a:pPr>
             <a:r>
+              <a:rPr/>
               <a:t>Image</a:t>
             </a:r>
           </a:p>
@@ -4523,6 +4536,7 @@
               <a:buNone/>
             </a:pPr>
             <a:r>
+              <a:rPr/>
               <a:t>“create an image showing how a literature review is a mini-argument embedded within the larger argument of an article or dissertation”</a:t>
             </a:r>
           </a:p>
@@ -4582,6 +4596,7 @@
               <a:buNone/>
             </a:pPr>
             <a:r>
+              <a:rPr/>
               <a:t>Image</a:t>
             </a:r>
           </a:p>
@@ -4631,6 +4646,7 @@
               <a:buNone/>
             </a:pPr>
             <a:r>
+              <a:rPr/>
               <a:t>Hour 2 (might get here early)…</a:t>
             </a:r>
           </a:p>
@@ -4720,12 +4736,14 @@
           <a:p>
             <a:pPr lvl="0"/>
             <a:r>
+              <a:rPr/>
               <a:t>What’s the gap in the literature? (should eventually coincide with the research question)</a:t>
             </a:r>
           </a:p>
           <a:p>
             <a:pPr lvl="1"/>
             <a:r>
+              <a:rPr/>
               <a:t>What are you </a:t>
             </a:r>
             <a:r>
@@ -4733,12 +4751,14 @@
               <a:t>arguing</a:t>
             </a:r>
             <a:r>
+              <a:rPr/>
               <a:t>? That this gap exists… (perhaps other things too)</a:t>
             </a:r>
           </a:p>
           <a:p>
             <a:pPr lvl="0"/>
             <a:r>
+              <a:rPr/>
               <a:t>Develop a </a:t>
             </a:r>
             <a:r>
@@ -4746,36 +4766,42 @@
               <a:t>Methodology</a:t>
             </a:r>
             <a:r>
+              <a:rPr/>
               <a:t>:</a:t>
             </a:r>
           </a:p>
           <a:p>
             <a:pPr lvl="1"/>
             <a:r>
+              <a:rPr/>
               <a:t>Choose relevant search terms (think about AI’s ability to translate the terms you think of to the ones you don’t)</a:t>
             </a:r>
           </a:p>
           <a:p>
             <a:pPr lvl="2"/>
             <a:r>
+              <a:rPr/>
               <a:t>Pick a couple of relevant articles and read the references</a:t>
             </a:r>
           </a:p>
           <a:p>
             <a:pPr lvl="1"/>
             <a:r>
+              <a:rPr/>
               <a:t>Choose an organization principles:</a:t>
             </a:r>
           </a:p>
           <a:p>
             <a:pPr lvl="2"/>
             <a:r>
+              <a:rPr/>
               <a:t>Organize by theme? What are the themes?</a:t>
             </a:r>
           </a:p>
           <a:p>
             <a:pPr lvl="2"/>
             <a:r>
+              <a:rPr/>
               <a:t>Organize by time? How have debates on topic X </a:t>
             </a:r>
             <a:r>
@@ -4783,12 +4809,14 @@
               <a:t>evolved</a:t>
             </a:r>
             <a:r>
+              <a:rPr/>
               <a:t>?</a:t>
             </a:r>
           </a:p>
           <a:p>
             <a:pPr lvl="0"/>
             <a:r>
+              <a:rPr/>
               <a:t>Construct an </a:t>
             </a:r>
             <a:r>
@@ -4796,6 +4824,7 @@
               <a:t>Introduction</a:t>
             </a:r>
             <a:r>
+              <a:rPr/>
               <a:t> and </a:t>
             </a:r>
             <a:r>
@@ -4861,6 +4890,7 @@
           <a:p>
             <a:pPr lvl="0"/>
             <a:r>
+              <a:rPr/>
               <a:t>What is the </a:t>
             </a:r>
             <a:r>
@@ -4868,12 +4898,14 @@
               <a:t>field</a:t>
             </a:r>
             <a:r>
+              <a:rPr/>
               <a:t>? Talk your reader through it…</a:t>
             </a:r>
           </a:p>
           <a:p>
             <a:pPr lvl="0"/>
             <a:r>
+              <a:rPr/>
               <a:t>What is the </a:t>
             </a:r>
             <a:r>
@@ -4881,12 +4913,14 @@
               <a:t>gap</a:t>
             </a:r>
             <a:r>
+              <a:rPr/>
               <a:t>? Tell your reader how you get there…</a:t>
             </a:r>
           </a:p>
           <a:p>
             <a:pPr lvl="1"/>
             <a:r>
+              <a:rPr/>
               <a:t>work backwards - find the gap, </a:t>
             </a:r>
             <a:r>
@@ -4894,12 +4928,14 @@
               <a:t>then</a:t>
             </a:r>
             <a:r>
+              <a:rPr/>
               <a:t> organize the steps…</a:t>
             </a:r>
           </a:p>
           <a:p>
             <a:pPr lvl="0"/>
             <a:r>
+              <a:rPr/>
               <a:t>Use the language of </a:t>
             </a:r>
             <a:r>
@@ -4907,6 +4943,7 @@
               <a:t>argument</a:t>
             </a:r>
             <a:r>
+              <a:rPr/>
               <a:t> / </a:t>
             </a:r>
             <a:r>
@@ -4914,60 +4951,70 @@
               <a:t>metadiscourse</a:t>
             </a:r>
             <a:r>
+              <a:rPr/>
               <a:t>:</a:t>
             </a:r>
           </a:p>
           <a:p>
             <a:pPr lvl="1"/>
             <a:r>
+              <a:rPr/>
               <a:t>If we are on a “path” through the “field”, join the dots:</a:t>
             </a:r>
           </a:p>
           <a:p>
             <a:pPr lvl="2"/>
             <a:r>
+              <a:rPr/>
               <a:t>Move up / down: general - specific</a:t>
             </a:r>
           </a:p>
           <a:p>
             <a:pPr lvl="3"/>
             <a:r>
+              <a:rPr/>
               <a:t>“More generally…”, “At an abstract level”, “Theoretically…”, “Globally / Nationally…”</a:t>
             </a:r>
           </a:p>
           <a:p>
             <a:pPr lvl="3"/>
             <a:r>
+              <a:rPr/>
               <a:t>“More specifically…”, “At an concrete level”, “Pratically”, “Locally</a:t>
             </a:r>
           </a:p>
           <a:p>
             <a:pPr lvl="2"/>
             <a:r>
+              <a:rPr/>
               <a:t>Move side to side: similar - different</a:t>
             </a:r>
           </a:p>
           <a:p>
             <a:pPr lvl="3"/>
             <a:r>
+              <a:rPr/>
               <a:t>“Similarly…”, “Along the same lines…”,</a:t>
             </a:r>
           </a:p>
           <a:p>
             <a:pPr lvl="3"/>
             <a:r>
+              <a:rPr/>
               <a:t>“However…”, “Conversely…”, “On the other hand…”, “In contrast…”</a:t>
             </a:r>
           </a:p>
           <a:p>
             <a:pPr lvl="1"/>
             <a:r>
+              <a:rPr/>
               <a:t>“Control” your navigation:</a:t>
             </a:r>
           </a:p>
           <a:p>
             <a:pPr lvl="2"/>
             <a:r>
+              <a:rPr/>
               <a:t>“This review </a:t>
             </a:r>
             <a:r>
@@ -4975,18 +5022,21 @@
               <a:t>will</a:t>
             </a:r>
             <a:r>
+              <a:rPr/>
               <a:t> cover…”, “The literature describes several facets of…”</a:t>
             </a:r>
           </a:p>
           <a:p>
             <a:pPr lvl="2"/>
             <a:r>
+              <a:rPr/>
               <a:t>Add some drama: “Meanwhile…”, “Despite…”, “X has dispute Y’s findings…”</a:t>
             </a:r>
           </a:p>
           <a:p>
             <a:pPr lvl="2"/>
             <a:r>
+              <a:rPr/>
               <a:t>“This review </a:t>
             </a:r>
             <a:r>
@@ -4994,6 +5044,7 @@
               <a:t>has</a:t>
             </a:r>
             <a:r>
+              <a:rPr/>
               <a:t> covered…”</a:t>
             </a:r>
           </a:p>
@@ -5053,24 +5104,28 @@
           <a:p>
             <a:pPr lvl="0"/>
             <a:r>
+              <a:rPr/>
               <a:t>Look at the whole picture - does it make sense?</a:t>
             </a:r>
           </a:p>
           <a:p>
             <a:pPr lvl="0"/>
             <a:r>
+              <a:rPr/>
               <a:t>Fill it in piece by piece</a:t>
             </a:r>
           </a:p>
           <a:p>
             <a:pPr lvl="0"/>
             <a:r>
+              <a:rPr/>
               <a:t>Iterate - whole to part, part to whole</a:t>
             </a:r>
           </a:p>
           <a:p>
             <a:pPr lvl="0"/>
             <a:r>
+              <a:rPr/>
               <a:t>More vocabularly: the </a:t>
             </a:r>
             <a:r>
@@ -5081,12 +5136,14 @@
           <a:p>
             <a:pPr lvl="1"/>
             <a:r>
+              <a:rPr/>
               <a:t>Understand the Whole (in order to Interpret the Path)</a:t>
             </a:r>
           </a:p>
           <a:p>
             <a:pPr lvl="1"/>
             <a:r>
+              <a:rPr/>
               <a:t>Interpret the Path (in order to Understanding the Whole)</a:t>
             </a:r>
           </a:p>
@@ -5146,30 +5203,35 @@
           <a:p>
             <a:pPr lvl="0"/>
             <a:r>
+              <a:rPr/>
               <a:t>The Annotated Bibliography and the Literature Review</a:t>
             </a:r>
           </a:p>
           <a:p>
             <a:pPr lvl="0"/>
             <a:r>
+              <a:rPr/>
               <a:t>Tone: Navigating The Two Cultures (see Snow 1959)</a:t>
             </a:r>
           </a:p>
           <a:p>
             <a:pPr lvl="0"/>
             <a:r>
+              <a:rPr/>
               <a:t>Lack of Signposting / metadiscourse / discourse markers / rhetorical statements</a:t>
             </a:r>
           </a:p>
           <a:p>
             <a:pPr lvl="0"/>
             <a:r>
+              <a:rPr/>
               <a:t>Lack of persuasive purpose</a:t>
             </a:r>
           </a:p>
           <a:p>
             <a:pPr lvl="0"/>
             <a:r>
+              <a:rPr/>
               <a:t>Laundry list of gaps -&gt; Narrow down on the one / two that you are likely to follow</a:t>
             </a:r>
           </a:p>
@@ -5231,42 +5293,49 @@
           <a:p>
             <a:pPr lvl="0"/>
             <a:r>
+              <a:rPr/>
               <a:t>Tone: Navigating The Two Cultures (see Snow 1959)</a:t>
             </a:r>
           </a:p>
           <a:p>
             <a:pPr lvl="0"/>
             <a:r>
+              <a:rPr/>
               <a:t>Scientist / Quantitative / Positivist</a:t>
             </a:r>
           </a:p>
           <a:p>
             <a:pPr lvl="1"/>
             <a:r>
+              <a:rPr/>
               <a:t>Lots of 3rd person / passive voice (“It was observed that…”) - But note, this is changing</a:t>
             </a:r>
           </a:p>
           <a:p>
             <a:pPr lvl="0"/>
             <a:r>
+              <a:rPr/>
               <a:t>Humanist / Qualitative / Post-positivist or Interpretivist or Constuctivist</a:t>
             </a:r>
           </a:p>
           <a:p>
             <a:pPr lvl="1"/>
             <a:r>
+              <a:rPr/>
               <a:t>More 1st person / active voice (“We noticed that”)</a:t>
             </a:r>
           </a:p>
           <a:p>
             <a:pPr lvl="0"/>
             <a:r>
+              <a:rPr/>
               <a:t>In the field of education, both “cultures” co-exist (sometimes even peacefully)</a:t>
             </a:r>
           </a:p>
           <a:p>
             <a:pPr lvl="0"/>
             <a:r>
+              <a:rPr/>
               <a:t>How do you decide on your tone?</a:t>
             </a:r>
           </a:p>
@@ -6012,6 +6081,7 @@
               <a:buAutoNum type="arabicPeriod"/>
             </a:pPr>
             <a:r>
+              <a:rPr/>
               <a:t>Keerthiraj, &amp; Misra, A. (2025). Who owns the future? AI, digital sovereignty, and the politics of knowledge. AI &amp; SOCIETY, 1-13. https://link.springer.com/article/10.1007/s00146-025-02641-y</a:t>
             </a:r>
             <a:br/>
@@ -6022,6 +6092,7 @@
               <a:buAutoNum type="arabicPeriod"/>
             </a:pPr>
             <a:r>
+              <a:rPr/>
               <a:t>Liu, J., Zhang, Y., Li, W., Wang, Q., Niu, P., &amp; Zhang, X. (2025). Adaptive vs. Planned Metacognitive Scaffolding for Computational Thinking: Evidence from Generative AI-Supported Programming in Elementary Education. Computers &amp; Education, 105473. https://www.sciencedirect.com/science/article/pii/S0360131525002416?casa_token=cBNpQ0r7f4oAAAAA:THnluE0eVY1uTJ3bnp1V6j-fsLEXobOB6QqoszFx_hsNacpAVPMmIe61gO70IXtFPiT2vIRcGPk</a:t>
             </a:r>
           </a:p>
@@ -6030,12 +6101,14 @@
               <a:buAutoNum type="arabicPeriod"/>
             </a:pPr>
             <a:r>
+              <a:rPr/>
               <a:t>Spivak, G. C. (2023). Can the subaltern speak?. In Imperialism (pp. 171-219). Routledge. http://users.uoa.gr/~cdokou/TheoryCriticismTexts/Spivak-Subaltern.pdf</a:t>
             </a:r>
           </a:p>
           <a:p>
             <a:pPr lvl="0"/>
             <a:r>
+              <a:rPr/>
               <a:t>Why these two (three) examples? Contrasting methods, yes - but more than this, these articles reflect different orientations towards </a:t>
             </a:r>
             <a:r>
@@ -6101,48 +6174,56 @@
           <a:p>
             <a:pPr lvl="0"/>
             <a:r>
+              <a:rPr/>
               <a:t>What are the different ways of reading?</a:t>
             </a:r>
           </a:p>
           <a:p>
             <a:pPr lvl="0"/>
             <a:r>
+              <a:rPr/>
               <a:t>2 Common Strategies:</a:t>
             </a:r>
           </a:p>
           <a:p>
             <a:pPr lvl="1"/>
             <a:r>
+              <a:rPr/>
               <a:t>Top to bottom</a:t>
             </a:r>
           </a:p>
           <a:p>
             <a:pPr lvl="1"/>
             <a:r>
+              <a:rPr/>
               <a:t>Abstract, Introduction, Conclusion - then the rest</a:t>
             </a:r>
           </a:p>
           <a:p>
             <a:pPr lvl="0"/>
             <a:r>
+              <a:rPr/>
               <a:t>Sometimes:</a:t>
             </a:r>
           </a:p>
           <a:p>
             <a:pPr lvl="1"/>
             <a:r>
+              <a:rPr/>
               <a:t>Literature Review first</a:t>
             </a:r>
           </a:p>
           <a:p>
             <a:pPr lvl="1"/>
             <a:r>
+              <a:rPr/>
               <a:t>Methodology first (what did the researchers do?)</a:t>
             </a:r>
           </a:p>
           <a:p>
             <a:pPr lvl="1"/>
             <a:r>
+              <a:rPr/>
               <a:t>References first (what “space” of academia does this belong in?)</a:t>
             </a:r>
           </a:p>
@@ -6151,6 +6232,7 @@
               <a:buNone/>
             </a:pPr>
             <a:r>
+              <a:rPr/>
               <a:t>Other ideas?</a:t>
             </a:r>
           </a:p>
@@ -6162,7 +6244,7 @@
               <a:rPr>
                 <a:hlinkClick r:id="rId2"/>
               </a:rPr>
-              <a:t>ERAM 590 - Google Docs</a:t>
+              <a:t>EPOL 590 Fall 2026 class document</a:t>
             </a:r>
           </a:p>
         </p:txBody>
@@ -6227,6 +6309,7 @@
               <a:buNone/>
             </a:pPr>
             <a:r>
+              <a:rPr/>
               <a:t>Keerthiraj, &amp; Misra, A. (2025). Who owns the future? AI, digital sovereignty, and the politics of knowledge. AI &amp; SOCIETY, 1-13. https://link.springer.com/article/10.1007/s00146-025-02641-y</a:t>
             </a:r>
           </a:p>
@@ -6288,6 +6371,7 @@
               <a:buNone/>
             </a:pPr>
             <a:r>
+              <a:rPr/>
               <a:t>Liu, J., Zhang, Y., Li, W., Wang, Q., Niu, P., &amp; Zhang, X. (2025). Adaptive vs. Planned Metacognitive Scaffolding for Computational Thinking: Evidence from Generative AI-Supported Programming in Elementary Education. Computers &amp; Education, 105473. https://www.sciencedirect.com/science/article/pii/S0360131525002416?casa_token=cBNpQ0r7f4oAAAAA:THnluE0eVY1uTJ3bnp1V6j-fsLEXobOB6QqoszFx_hsNacpAVPMmIe61gO70IXtFPiT2vIRcGPk</a:t>
             </a:r>
           </a:p>
@@ -6349,6 +6433,7 @@
               <a:buNone/>
             </a:pPr>
             <a:r>
+              <a:rPr/>
               <a:t>Spivak, G. C. (2023). Can the subaltern speak?. In Imperialism (pp. 171-219). Routledge. http://users.uoa.gr/~cdokou/TheoryCriticismTexts/Spivak-Subaltern.pdf</a:t>
             </a:r>
           </a:p>
@@ -6398,6 +6483,7 @@
               <a:buNone/>
             </a:pPr>
             <a:r>
+              <a:rPr/>
               <a:t>Hour 3</a:t>
             </a:r>
           </a:p>
@@ -6489,6 +6575,7 @@
               <a:buAutoNum type="arabicPeriod"/>
             </a:pPr>
             <a:r>
+              <a:rPr/>
               <a:t>What are the key terms of the (draft) research question? List them…</a:t>
             </a:r>
           </a:p>
@@ -6497,6 +6584,7 @@
               <a:buAutoNum type="arabicPeriod"/>
             </a:pPr>
             <a:r>
+              <a:rPr/>
               <a:t>What are the </a:t>
             </a:r>
             <a:r>
@@ -6504,6 +6592,7 @@
               <a:t>norms</a:t>
             </a:r>
             <a:r>
+              <a:rPr/>
               <a:t> of your field? And what </a:t>
             </a:r>
             <a:r>
@@ -6511,6 +6600,7 @@
               <a:t>is</a:t>
             </a:r>
             <a:r>
+              <a:rPr/>
               <a:t> your field?</a:t>
             </a:r>
           </a:p>
@@ -6519,6 +6609,7 @@
               <a:buAutoNum type="arabicPeriod"/>
             </a:pPr>
             <a:r>
+              <a:rPr/>
               <a:t>What is a reasonable </a:t>
             </a:r>
             <a:r>
@@ -6526,6 +6617,7 @@
               <a:t>method</a:t>
             </a:r>
             <a:r>
+              <a:rPr/>
               <a:t> or </a:t>
             </a:r>
             <a:r>
@@ -6533,6 +6625,7 @@
               <a:t>recipe</a:t>
             </a:r>
             <a:r>
+              <a:rPr/>
               <a:t> for your literature review?</a:t>
             </a:r>
           </a:p>
@@ -6541,6 +6634,7 @@
               <a:buAutoNum type="arabicPeriod"/>
             </a:pPr>
             <a:r>
+              <a:rPr/>
               <a:t>What are </a:t>
             </a:r>
             <a:r>
@@ -6548,6 +6642,7 @@
               <a:t>related terms</a:t>
             </a:r>
             <a:r>
+              <a:rPr/>
               <a:t> (can AI find reasonable synonyms)?</a:t>
             </a:r>
           </a:p>
@@ -6556,6 +6651,7 @@
               <a:buAutoNum type="arabicPeriod"/>
             </a:pPr>
             <a:r>
+              <a:rPr/>
               <a:t>What do you get when you search </a:t>
             </a:r>
             <a:r>
@@ -6563,6 +6659,7 @@
               <a:t>Google Scholar</a:t>
             </a:r>
             <a:r>
+              <a:rPr/>
               <a:t> / </a:t>
             </a:r>
             <a:r>
@@ -6570,6 +6667,7 @@
               <a:t>library databases</a:t>
             </a:r>
             <a:r>
+              <a:rPr/>
               <a:t> for these terms?</a:t>
             </a:r>
           </a:p>
@@ -6578,6 +6676,7 @@
               <a:buAutoNum type="arabicPeriod"/>
             </a:pPr>
             <a:r>
+              <a:rPr/>
               <a:t>Do you have </a:t>
             </a:r>
             <a:r>
@@ -6585,6 +6684,7 @@
               <a:t>existing articles</a:t>
             </a:r>
             <a:r>
+              <a:rPr/>
               <a:t> / authors to draw from?</a:t>
             </a:r>
           </a:p>
@@ -6593,6 +6693,7 @@
               <a:buAutoNum type="arabicPeriod"/>
             </a:pPr>
             <a:r>
+              <a:rPr/>
               <a:t>What </a:t>
             </a:r>
             <a:r>
@@ -6600,6 +6701,7 @@
               <a:t>citation system</a:t>
             </a:r>
             <a:r>
+              <a:rPr/>
               <a:t> are you using? Can you code / organize literature in the way you’d like?</a:t>
             </a:r>
           </a:p>
@@ -6608,6 +6710,7 @@
               <a:buAutoNum type="arabicPeriod"/>
             </a:pPr>
             <a:r>
+              <a:rPr/>
               <a:t>What is the best </a:t>
             </a:r>
             <a:r>
@@ -6615,6 +6718,7 @@
               <a:t>organization</a:t>
             </a:r>
             <a:r>
+              <a:rPr/>
               <a:t> of the literature? Thematic, field (for multi-/interdisciplinary work), chronological, spatial, general / special?</a:t>
             </a:r>
           </a:p>
@@ -6623,6 +6727,7 @@
               <a:buAutoNum type="arabicPeriod"/>
             </a:pPr>
             <a:r>
+              <a:rPr/>
               <a:t>Are there </a:t>
             </a:r>
             <a:r>
@@ -6630,6 +6735,7 @@
               <a:t>classics</a:t>
             </a:r>
             <a:r>
+              <a:rPr/>
               <a:t> you are expected to cite? References with very large number of citations (e.g. Braun &amp; Clarke 2006; Vaswani et al. 2017; Bender et al. 2021)?</a:t>
             </a:r>
           </a:p>
@@ -6695,6 +6801,7 @@
               <a:t>Time</a:t>
             </a:r>
             <a:r>
+              <a:rPr/>
               <a:t>, followed by </a:t>
             </a:r>
             <a:r>
@@ -6702,6 +6809,7 @@
               <a:t>theme</a:t>
             </a:r>
             <a:r>
+              <a:rPr/>
               <a:t>, followed by </a:t>
             </a:r>
             <a:r>
@@ -6712,6 +6820,7 @@
           <a:p>
             <a:pPr lvl="0"/>
             <a:r>
+              <a:rPr/>
               <a:t>Just be approximate</a:t>
             </a:r>
           </a:p>
@@ -6720,6 +6829,7 @@
               <a:buNone/>
             </a:pPr>
             <a:r>
+              <a:rPr/>
               <a:t>“Criticism of AI </a:t>
             </a:r>
             <a:r>
@@ -6727,6 +6837,7 @@
               <a:t>dates back</a:t>
             </a:r>
             <a:r>
+              <a:rPr/>
               <a:t> to the inception of the field itself. For example, Dreyfus (1966 - or thereabouts) discussed the brittleness of (etc)… By the early 1980s, scepticism voiced by philosophers such as Searle (1981) in his famous”Chinese room” experiment, contributed to the emergence of an AI winter. </a:t>
             </a:r>
             <a:r>
@@ -6734,6 +6845,7 @@
               <a:t>More recently</a:t>
             </a:r>
             <a:r>
+              <a:rPr/>
               <a:t>, as generative AI has largely revived the field, criticism has been directed toward both issues of </a:t>
             </a:r>
             <a:r>
@@ -6741,6 +6853,7 @@
               <a:t>social justice and bias</a:t>
             </a:r>
             <a:r>
+              <a:rPr/>
               <a:t> (e.g. Bender et al. 2021) and potential </a:t>
             </a:r>
             <a:r>
@@ -6748,6 +6861,7 @@
               <a:t>existential risk</a:t>
             </a:r>
             <a:r>
+              <a:rPr/>
               <a:t> (e.g. lesswrong blog). In some cases, critical AI scholars have also argued the existential case is a convenient disguise that obscures more immediate negative social effects (Gebru and Torres 2024). Moreover scholars from </a:t>
             </a:r>
             <a:r>
@@ -6755,6 +6869,7 @@
               <a:t>outside the US</a:t>
             </a:r>
             <a:r>
+              <a:rPr/>
               <a:t> - particularly in the Global South – have begun to argue AI constitutes a form of </a:t>
             </a:r>
             <a:r>
@@ -6762,18 +6877,21 @@
               <a:t>neocolonialism</a:t>
             </a:r>
             <a:r>
+              <a:rPr/>
               <a:t>, impacting digital sovereignty (Keerthiraj, &amp; Misra 2025)”</a:t>
             </a:r>
           </a:p>
           <a:p>
             <a:pPr lvl="0"/>
             <a:r>
+              <a:rPr/>
               <a:t>Can work with or without AI - useful just to test how this or that understanding helps make your case (about gaps)</a:t>
             </a:r>
           </a:p>
           <a:p>
             <a:pPr lvl="0"/>
             <a:r>
+              <a:rPr/>
               <a:t>Don’t commit to this structure just yet!</a:t>
             </a:r>
           </a:p>
@@ -6837,6 +6955,7 @@
               <a:buAutoNum type="arabicPeriod"/>
             </a:pPr>
             <a:r>
+              <a:rPr/>
               <a:t>Tentative gap - what do you think it is?</a:t>
             </a:r>
           </a:p>
@@ -6845,6 +6964,7 @@
               <a:buAutoNum type="arabicPeriod"/>
             </a:pPr>
             <a:r>
+              <a:rPr/>
               <a:t>Scaffold your review - how many sections? do you need subsections? Add preliminary citations</a:t>
             </a:r>
           </a:p>
@@ -6853,6 +6973,7 @@
               <a:buAutoNum type="arabicPeriod"/>
             </a:pPr>
             <a:r>
+              <a:rPr/>
               <a:t>Develop a sense of key transitions - what’s the drama in the review? “also argued”, “moreover” etc</a:t>
             </a:r>
           </a:p>
@@ -6861,6 +6982,7 @@
               <a:buAutoNum type="arabicPeriod"/>
             </a:pPr>
             <a:r>
+              <a:rPr/>
               <a:t>Be light, noncommital - prepared to cut/paste</a:t>
             </a:r>
           </a:p>
@@ -6869,6 +6991,7 @@
               <a:buAutoNum type="arabicPeriod"/>
             </a:pPr>
             <a:r>
+              <a:rPr/>
               <a:t>As your literature grows, you might need to </a:t>
             </a:r>
             <a:r>
@@ -6876,6 +6999,7 @@
               <a:t>qualify</a:t>
             </a:r>
             <a:r>
+              <a:rPr/>
               <a:t> the statement of the gap. Maybe there </a:t>
             </a:r>
             <a:r>
@@ -6883,6 +7007,7 @@
               <a:t>are</a:t>
             </a:r>
             <a:r>
+              <a:rPr/>
               <a:t> studies of the general topic X - but you can add </a:t>
             </a:r>
             <a:r>
@@ -6890,6 +7015,7 @@
               <a:t>adjectives</a:t>
             </a:r>
             <a:r>
+              <a:rPr/>
               <a:t> to the gap (research question) to narrow it down… Go back to Step 1, rinse and repeat…</a:t>
             </a:r>
           </a:p>
@@ -6951,30 +7077,35 @@
           <a:p>
             <a:pPr lvl="0"/>
             <a:r>
+              <a:rPr/>
               <a:t>Different perspectives - outside the ordinary frame of discipline, time</a:t>
             </a:r>
           </a:p>
           <a:p>
             <a:pPr lvl="1"/>
             <a:r>
+              <a:rPr/>
               <a:t>e.g. “heteroscopia” (“many visions”) - concept by Jaireth (2001) to describe Indian cinema</a:t>
             </a:r>
           </a:p>
           <a:p>
             <a:pPr lvl="1"/>
             <a:r>
+              <a:rPr/>
               <a:t>But also a useful term for thinking about machinic vision, generative AI</a:t>
             </a:r>
           </a:p>
           <a:p>
             <a:pPr lvl="0"/>
             <a:r>
+              <a:rPr/>
               <a:t>Less-known authors (especially not widely cited) - this can enrich a review, demonstrating greater awareness beyond the same few authors / studies…</a:t>
             </a:r>
           </a:p>
           <a:p>
             <a:pPr lvl="1"/>
             <a:r>
+              <a:rPr/>
               <a:t>e.g. History of AI - typically focussed on US developments. But Schmidhuber (1922) argues the importance of developments in Ukraine (USSR), Japan, Finland in the 1960s/70s. Who knew?</a:t>
             </a:r>
           </a:p>
@@ -7106,6 +7237,7 @@
               <a:buNone/>
             </a:pPr>
             <a:r>
+              <a:rPr/>
               <a:t>Recap on Week 1</a:t>
             </a:r>
           </a:p>
@@ -7949,18 +8081,21 @@
               <a:buNone/>
             </a:pPr>
             <a:r>
+              <a:rPr/>
               <a:t>Different techniques for expanding your database:</a:t>
             </a:r>
           </a:p>
           <a:p>
             <a:pPr lvl="0"/>
             <a:r>
+              <a:rPr/>
               <a:t>Search (Google Scholar / library databases)</a:t>
             </a:r>
           </a:p>
           <a:p>
             <a:pPr lvl="0"/>
             <a:r>
+              <a:rPr/>
               <a:t>With existing articles:</a:t>
             </a:r>
           </a:p>
@@ -7971,6 +8106,7 @@
               <a:t>Go back</a:t>
             </a:r>
             <a:r>
+              <a:rPr/>
               <a:t>: Scan </a:t>
             </a:r>
             <a:r>
@@ -7978,6 +8114,7 @@
               <a:t>references</a:t>
             </a:r>
             <a:r>
+              <a:rPr/>
               <a:t> of this article</a:t>
             </a:r>
           </a:p>
@@ -7988,6 +8125,7 @@
               <a:t>Go forward</a:t>
             </a:r>
             <a:r>
+              <a:rPr/>
               <a:t>: Search for </a:t>
             </a:r>
             <a:r>
@@ -7995,6 +8133,7 @@
               <a:t>citations</a:t>
             </a:r>
             <a:r>
+              <a:rPr/>
               <a:t> of this article</a:t>
             </a:r>
           </a:p>
@@ -8005,18 +8144,21 @@
               <a:t>Go sideways</a:t>
             </a:r>
             <a:r>
+              <a:rPr/>
               <a:t>: What else was published in the same journal / issue</a:t>
             </a:r>
           </a:p>
           <a:p>
             <a:pPr lvl="0"/>
             <a:r>
+              <a:rPr/>
               <a:t>Check common “authorities”: Wikipedia, syllabi, AI</a:t>
             </a:r>
           </a:p>
           <a:p>
             <a:pPr lvl="1"/>
             <a:r>
+              <a:rPr/>
               <a:t>e.g. “Critical AI” - people will be citing Bender et al. (2021) stochastic parrots paper</a:t>
             </a:r>
           </a:p>
@@ -8080,6 +8222,7 @@
               <a:buAutoNum type="arabicPeriod"/>
             </a:pPr>
             <a:r>
+              <a:rPr/>
               <a:t>Write down the gap (should be close to your research question)</a:t>
             </a:r>
           </a:p>
@@ -8088,6 +8231,7 @@
               <a:buAutoNum type="arabicPeriod"/>
             </a:pPr>
             <a:r>
+              <a:rPr/>
               <a:t>Write down your assumed audience / field. What do you know about them? Do they prefer lots of recent citations (science)? Or fewer, with more emphasis on the classics (philosophy, theory, some qual studies)?</a:t>
             </a:r>
           </a:p>
@@ -8096,48 +8240,56 @@
               <a:buAutoNum type="arabicPeriod"/>
             </a:pPr>
             <a:r>
+              <a:rPr/>
               <a:t>Create a short plan / recipe method:</a:t>
             </a:r>
           </a:p>
           <a:p>
             <a:pPr lvl="1"/>
             <a:r>
+              <a:rPr/>
               <a:t>“Search for these terms / filters”</a:t>
             </a:r>
           </a:p>
           <a:p>
             <a:pPr lvl="1"/>
             <a:r>
+              <a:rPr/>
               <a:t>“Create a database of 10 articles”</a:t>
             </a:r>
           </a:p>
           <a:p>
             <a:pPr lvl="1"/>
             <a:r>
+              <a:rPr/>
               <a:t>“Scan the articles for relevance - discard those that are not relevant”</a:t>
             </a:r>
           </a:p>
           <a:p>
             <a:pPr lvl="1"/>
             <a:r>
+              <a:rPr/>
               <a:t>“With remaining articles: review references, search for more recent citations”</a:t>
             </a:r>
           </a:p>
           <a:p>
             <a:pPr lvl="1"/>
             <a:r>
+              <a:rPr/>
               <a:t>“Once I have 50 articles: code / annototate for relevance”</a:t>
             </a:r>
           </a:p>
           <a:p>
             <a:pPr lvl="1"/>
             <a:r>
+              <a:rPr/>
               <a:t>“Map out review structure; add citations, continue to search under subheadings”</a:t>
             </a:r>
           </a:p>
           <a:p>
             <a:pPr lvl="1"/>
             <a:r>
+              <a:rPr/>
               <a:t>“Supply list of refs to AI and ask if I’m missing anything crucial” &lt;!–</a:t>
             </a:r>
           </a:p>
@@ -8146,6 +8298,7 @@
               <a:buAutoNum type="arabicPeriod"/>
             </a:pPr>
             <a:r>
+              <a:rPr/>
               <a:t>Develop a rough structure of headings / subheadings</a:t>
             </a:r>
           </a:p>
@@ -8154,6 +8307,7 @@
               <a:buAutoNum type="arabicPeriod"/>
             </a:pPr>
             <a:r>
+              <a:rPr/>
               <a:t>Lay in some initial citations (if you know them), with indicative transitional language (“also”, “however” etc) –&gt;</a:t>
             </a:r>
           </a:p>
@@ -8226,6 +8380,7 @@
               <a:buNone/>
             </a:pPr>
             <a:r>
+              <a:rPr/>
               <a:t>Aarseth, E. J. (1997). Cybertext: Perspectives on ergodic literature. JHU Press. </a:t>
             </a:r>
             <a:r>
@@ -11095,6 +11250,7 @@
           <a:p>
             <a:pPr lvl="0"/>
             <a:r>
+              <a:rPr/>
               <a:t>Would you read an article by a </a:t>
             </a:r>
             <a:r>
@@ -11102,12 +11258,14 @@
               <a:t>bot</a:t>
             </a:r>
             <a:r>
+              <a:rPr/>
               <a:t>? Under what circumstances?</a:t>
             </a:r>
           </a:p>
           <a:p>
             <a:pPr lvl="0"/>
             <a:r>
+              <a:rPr/>
               <a:t>What about a math paper?</a:t>
             </a:r>
           </a:p>
@@ -11167,6 +11325,7 @@
               <a:buNone/>
             </a:pPr>
             <a:r>
+              <a:rPr/>
               <a:t>Image</a:t>
             </a:r>
           </a:p>
@@ -11226,6 +11385,7 @@
               <a:buNone/>
             </a:pPr>
             <a:r>
+              <a:rPr/>
               <a:t>Image</a:t>
             </a:r>
           </a:p>
@@ -11287,42 +11447,49 @@
           <a:p>
             <a:pPr lvl="0"/>
             <a:r>
+              <a:rPr/>
               <a:t>Introduction</a:t>
             </a:r>
           </a:p>
           <a:p>
             <a:pPr lvl="0"/>
             <a:r>
+              <a:rPr/>
               <a:t>Literature Review</a:t>
             </a:r>
           </a:p>
           <a:p>
             <a:pPr lvl="0"/>
             <a:r>
+              <a:rPr/>
               <a:t>Methodology</a:t>
             </a:r>
           </a:p>
           <a:p>
             <a:pPr lvl="0"/>
             <a:r>
+              <a:rPr/>
               <a:t>Findings</a:t>
             </a:r>
           </a:p>
           <a:p>
             <a:pPr lvl="0"/>
             <a:r>
+              <a:rPr/>
               <a:t>Results</a:t>
             </a:r>
           </a:p>
           <a:p>
             <a:pPr lvl="0"/>
             <a:r>
+              <a:rPr/>
               <a:t>Conclusion</a:t>
             </a:r>
           </a:p>
           <a:p>
             <a:pPr lvl="0"/>
             <a:r>
+              <a:rPr/>
               <a:t>But </a:t>
             </a:r>
             <a:r>
@@ -11330,6 +11497,7 @@
               <a:t>why</a:t>
             </a:r>
             <a:r>
+              <a:rPr/>
               <a:t>? Why these parts?</a:t>
             </a:r>
           </a:p>
@@ -11338,6 +11506,7 @@
               <a:buNone/>
             </a:pPr>
             <a:r>
+              <a:rPr/>
               <a:t>Let’s answer this collaboratively:</a:t>
             </a:r>
           </a:p>
@@ -11349,7 +11518,7 @@
               <a:rPr>
                 <a:hlinkClick r:id="rId2"/>
               </a:rPr>
-              <a:t>ERAM 590 - Google Docs</a:t>
+              <a:t>EPOL 590 Fall 2026 class document</a:t>
             </a:r>
           </a:p>
         </p:txBody>

--- a/courses/590-fall-2026/590-lecture-2.pptx
+++ b/courses/590-fall-2026/590-lecture-2.pptx
@@ -6093,7 +6093,7 @@
             </a:pPr>
             <a:r>
               <a:rPr/>
-              <a:t>Liu, J., Zhang, Y., Li, W., Wang, Q., Niu, P., &amp; Zhang, X. (2025). Adaptive vs. Planned Metacognitive Scaffolding for Computational Thinking: Evidence from Generative AI-Supported Programming in Elementary Education. Computers &amp; Education, 105473. https://www.sciencedirect.com/science/article/pii/S0360131525002416?casa_token=cBNpQ0r7f4oAAAAA:THnluE0eVY1uTJ3bnp1V6j-fsLEXobOB6QqoszFx_hsNacpAVPMmIe61gO70IXtFPiT2vIRcGPk</a:t>
+              <a:t>Liu, J., Zhang, Y., Li, W., Wang, Q., Niu, P., &amp; Zhang, X. (2025). Adaptive vs. Planned Metacognitive Scaffolding for Computational Thinking: Evidence from Generative AI-Supported Programming in Elementary Education. Computers &amp; Education, 105473. https://doi.org/10.1016/j.compedu.2025.105473</a:t>
             </a:r>
           </a:p>
           <a:p>
@@ -6102,7 +6102,7 @@
             </a:pPr>
             <a:r>
               <a:rPr/>
-              <a:t>Spivak, G. C. (2023). Can the subaltern speak?. In Imperialism (pp. 171-219). Routledge. http://users.uoa.gr/~cdokou/TheoryCriticismTexts/Spivak-Subaltern.pdf</a:t>
+              <a:t>Spivak, G. C. (1988). Can the subaltern speak? In C. Nelson &amp; L. Grossberg (Eds.), Marxism and the interpretation of culture (pp. 271–313). University of Illinois Press. http://users.uoa.gr/~cdokou/TheoryCriticismTexts/Spivak-Subaltern.pdf</a:t>
             </a:r>
           </a:p>
           <a:p>
@@ -6372,7 +6372,7 @@
             </a:pPr>
             <a:r>
               <a:rPr/>
-              <a:t>Liu, J., Zhang, Y., Li, W., Wang, Q., Niu, P., &amp; Zhang, X. (2025). Adaptive vs. Planned Metacognitive Scaffolding for Computational Thinking: Evidence from Generative AI-Supported Programming in Elementary Education. Computers &amp; Education, 105473. https://www.sciencedirect.com/science/article/pii/S0360131525002416?casa_token=cBNpQ0r7f4oAAAAA:THnluE0eVY1uTJ3bnp1V6j-fsLEXobOB6QqoszFx_hsNacpAVPMmIe61gO70IXtFPiT2vIRcGPk</a:t>
+              <a:t>Liu, J., Zhang, Y., Li, W., Wang, Q., Niu, P., &amp; Zhang, X. (2025). Adaptive vs. Planned Metacognitive Scaffolding for Computational Thinking: Evidence from Generative AI-Supported Programming in Elementary Education. Computers &amp; Education, 105473. https://doi.org/10.1016/j.compedu.2025.105473</a:t>
             </a:r>
           </a:p>
         </p:txBody>
@@ -6434,7 +6434,7 @@
             </a:pPr>
             <a:r>
               <a:rPr/>
-              <a:t>Spivak, G. C. (2023). Can the subaltern speak?. In Imperialism (pp. 171-219). Routledge. http://users.uoa.gr/~cdokou/TheoryCriticismTexts/Spivak-Subaltern.pdf</a:t>
+              <a:t>Spivak, G. C. (1988). Can the subaltern speak? In C. Nelson &amp; L. Grossberg (Eds.), Marxism and the interpretation of culture (pp. 271–313). University of Illinois Press. http://users.uoa.gr/~cdokou/TheoryCriticismTexts/Spivak-Subaltern.pdf</a:t>
             </a:r>
           </a:p>
         </p:txBody>
